--- a/lectures/week_12_mixed_models/ex12_assignment.pptx
+++ b/lectures/week_12_mixed_models/ex12_assignment.pptx
@@ -6,9 +6,11 @@
   </p:sldMasterIdLst>
   <p:sldIdLst>
     <p:sldId id="257" r:id="rId2"/>
-    <p:sldId id="260" r:id="rId3"/>
-    <p:sldId id="261" r:id="rId4"/>
-    <p:sldId id="259" r:id="rId5"/>
+    <p:sldId id="262" r:id="rId3"/>
+    <p:sldId id="263" r:id="rId4"/>
+    <p:sldId id="260" r:id="rId5"/>
+    <p:sldId id="261" r:id="rId6"/>
+    <p:sldId id="259" r:id="rId7"/>
   </p:sldIdLst>
   <p:sldSz cx="12192000" cy="6858000"/>
   <p:notesSz cx="6858000" cy="9144000"/>
@@ -244,7 +246,7 @@
           <a:p>
             <a:fld id="{34454F2F-FBAD-5A42-9176-B0E5C5726216}" type="datetimeFigureOut">
               <a:rPr lang="en-US" smtClean="0"/>
-              <a:t>4/11/24</a:t>
+              <a:t>4/16/26</a:t>
             </a:fld>
             <a:endParaRPr lang="en-US"/>
           </a:p>
@@ -412,7 +414,7 @@
           <a:p>
             <a:fld id="{34454F2F-FBAD-5A42-9176-B0E5C5726216}" type="datetimeFigureOut">
               <a:rPr lang="en-US" smtClean="0"/>
-              <a:t>4/11/24</a:t>
+              <a:t>4/16/26</a:t>
             </a:fld>
             <a:endParaRPr lang="en-US"/>
           </a:p>
@@ -590,7 +592,7 @@
           <a:p>
             <a:fld id="{34454F2F-FBAD-5A42-9176-B0E5C5726216}" type="datetimeFigureOut">
               <a:rPr lang="en-US" smtClean="0"/>
-              <a:t>4/11/24</a:t>
+              <a:t>4/16/26</a:t>
             </a:fld>
             <a:endParaRPr lang="en-US"/>
           </a:p>
@@ -758,7 +760,7 @@
           <a:p>
             <a:fld id="{34454F2F-FBAD-5A42-9176-B0E5C5726216}" type="datetimeFigureOut">
               <a:rPr lang="en-US" smtClean="0"/>
-              <a:t>4/11/24</a:t>
+              <a:t>4/16/26</a:t>
             </a:fld>
             <a:endParaRPr lang="en-US"/>
           </a:p>
@@ -1003,7 +1005,7 @@
           <a:p>
             <a:fld id="{34454F2F-FBAD-5A42-9176-B0E5C5726216}" type="datetimeFigureOut">
               <a:rPr lang="en-US" smtClean="0"/>
-              <a:t>4/11/24</a:t>
+              <a:t>4/16/26</a:t>
             </a:fld>
             <a:endParaRPr lang="en-US"/>
           </a:p>
@@ -1232,7 +1234,7 @@
           <a:p>
             <a:fld id="{34454F2F-FBAD-5A42-9176-B0E5C5726216}" type="datetimeFigureOut">
               <a:rPr lang="en-US" smtClean="0"/>
-              <a:t>4/11/24</a:t>
+              <a:t>4/16/26</a:t>
             </a:fld>
             <a:endParaRPr lang="en-US"/>
           </a:p>
@@ -1596,7 +1598,7 @@
           <a:p>
             <a:fld id="{34454F2F-FBAD-5A42-9176-B0E5C5726216}" type="datetimeFigureOut">
               <a:rPr lang="en-US" smtClean="0"/>
-              <a:t>4/11/24</a:t>
+              <a:t>4/16/26</a:t>
             </a:fld>
             <a:endParaRPr lang="en-US"/>
           </a:p>
@@ -1713,7 +1715,7 @@
           <a:p>
             <a:fld id="{34454F2F-FBAD-5A42-9176-B0E5C5726216}" type="datetimeFigureOut">
               <a:rPr lang="en-US" smtClean="0"/>
-              <a:t>4/11/24</a:t>
+              <a:t>4/16/26</a:t>
             </a:fld>
             <a:endParaRPr lang="en-US"/>
           </a:p>
@@ -1808,7 +1810,7 @@
           <a:p>
             <a:fld id="{34454F2F-FBAD-5A42-9176-B0E5C5726216}" type="datetimeFigureOut">
               <a:rPr lang="en-US" smtClean="0"/>
-              <a:t>4/11/24</a:t>
+              <a:t>4/16/26</a:t>
             </a:fld>
             <a:endParaRPr lang="en-US"/>
           </a:p>
@@ -2083,7 +2085,7 @@
           <a:p>
             <a:fld id="{34454F2F-FBAD-5A42-9176-B0E5C5726216}" type="datetimeFigureOut">
               <a:rPr lang="en-US" smtClean="0"/>
-              <a:t>4/11/24</a:t>
+              <a:t>4/16/26</a:t>
             </a:fld>
             <a:endParaRPr lang="en-US"/>
           </a:p>
@@ -2335,7 +2337,7 @@
           <a:p>
             <a:fld id="{34454F2F-FBAD-5A42-9176-B0E5C5726216}" type="datetimeFigureOut">
               <a:rPr lang="en-US" smtClean="0"/>
-              <a:t>4/11/24</a:t>
+              <a:t>4/16/26</a:t>
             </a:fld>
             <a:endParaRPr lang="en-US"/>
           </a:p>
@@ -2546,7 +2548,7 @@
           <a:p>
             <a:fld id="{34454F2F-FBAD-5A42-9176-B0E5C5726216}" type="datetimeFigureOut">
               <a:rPr lang="en-US" smtClean="0"/>
-              <a:t>4/11/24</a:t>
+              <a:t>4/16/26</a:t>
             </a:fld>
             <a:endParaRPr lang="en-US"/>
           </a:p>
@@ -3031,7 +3033,13 @@
       </p:grpSpPr>
       <p:sp>
         <p:nvSpPr>
-          <p:cNvPr id="2" name="Title 1"/>
+          <p:cNvPr id="2" name="Title 1">
+            <a:extLst>
+              <a:ext uri="{FF2B5EF4-FFF2-40B4-BE49-F238E27FC236}">
+                <a16:creationId xmlns:a16="http://schemas.microsoft.com/office/drawing/2014/main" id="{6DF1CE12-5E5A-8C4F-7257-75571F4D6F7E}"/>
+              </a:ext>
+            </a:extLst>
+          </p:cNvPr>
           <p:cNvSpPr>
             <a:spLocks noGrp="1"/>
           </p:cNvSpPr>
@@ -3044,16 +3052,19 @@
           <a:bodyPr/>
           <a:lstStyle/>
           <a:p>
-            <a:r>
-              <a:rPr lang="en-US" dirty="0"/>
-              <a:t>Reference on writing results</a:t>
-            </a:r>
-          </a:p>
-        </p:txBody>
-      </p:sp>
-      <p:sp>
-        <p:nvSpPr>
-          <p:cNvPr id="3" name="Content Placeholder 2"/>
+            <a:endParaRPr lang="en-US"/>
+          </a:p>
+        </p:txBody>
+      </p:sp>
+      <p:sp>
+        <p:nvSpPr>
+          <p:cNvPr id="3" name="Content Placeholder 2">
+            <a:extLst>
+              <a:ext uri="{FF2B5EF4-FFF2-40B4-BE49-F238E27FC236}">
+                <a16:creationId xmlns:a16="http://schemas.microsoft.com/office/drawing/2014/main" id="{74E95303-52E5-DC0E-72BB-5F9960CF6489}"/>
+              </a:ext>
+            </a:extLst>
+          </p:cNvPr>
           <p:cNvSpPr>
             <a:spLocks noGrp="1"/>
           </p:cNvSpPr>
@@ -3066,34 +3077,44 @@
           <a:bodyPr/>
           <a:lstStyle/>
           <a:p>
-            <a:r>
-              <a:rPr lang="en-US" dirty="0"/>
-              <a:t>There is a document on canvas with some tips for writing results statements</a:t>
-            </a:r>
-          </a:p>
-          <a:p>
-            <a:endParaRPr lang="en-US" dirty="0"/>
-          </a:p>
-          <a:p>
-            <a:r>
-              <a:rPr lang="en-US" dirty="0"/>
-              <a:t>Your project write up should be ~1 paragraph (not long) and you’ll also hand in your </a:t>
-            </a:r>
-            <a:r>
-              <a:rPr lang="en-US" dirty="0" err="1"/>
-              <a:t>powerpoint</a:t>
-            </a:r>
-            <a:r>
-              <a:rPr lang="en-US" dirty="0"/>
-              <a:t> presentation</a:t>
-            </a:r>
-          </a:p>
-        </p:txBody>
-      </p:sp>
+            <a:endParaRPr lang="en-US"/>
+          </a:p>
+        </p:txBody>
+      </p:sp>
+      <p:pic>
+        <p:nvPicPr>
+          <p:cNvPr id="4" name="Picture 3">
+            <a:extLst>
+              <a:ext uri="{FF2B5EF4-FFF2-40B4-BE49-F238E27FC236}">
+                <a16:creationId xmlns:a16="http://schemas.microsoft.com/office/drawing/2014/main" id="{2DEA6960-66A7-3741-3977-31601C8114F5}"/>
+              </a:ext>
+            </a:extLst>
+          </p:cNvPr>
+          <p:cNvPicPr>
+            <a:picLocks noChangeAspect="1"/>
+          </p:cNvPicPr>
+          <p:nvPr/>
+        </p:nvPicPr>
+        <p:blipFill>
+          <a:blip r:embed="rId2"/>
+          <a:stretch>
+            <a:fillRect/>
+          </a:stretch>
+        </p:blipFill>
+        <p:spPr>
+          <a:xfrm>
+            <a:off x="2209800" y="1117381"/>
+            <a:ext cx="7772400" cy="4623237"/>
+          </a:xfrm>
+          <a:prstGeom prst="rect">
+            <a:avLst/>
+          </a:prstGeom>
+        </p:spPr>
+      </p:pic>
     </p:spTree>
     <p:extLst>
       <p:ext uri="{BB962C8B-B14F-4D97-AF65-F5344CB8AC3E}">
-        <p14:creationId xmlns:p14="http://schemas.microsoft.com/office/powerpoint/2010/main" val="781888978"/>
+        <p14:creationId xmlns:p14="http://schemas.microsoft.com/office/powerpoint/2010/main" val="3223674355"/>
       </p:ext>
     </p:extLst>
   </p:cSld>
@@ -3125,6 +3146,167 @@
           <p:cNvPr id="2" name="Title 1">
             <a:extLst>
               <a:ext uri="{FF2B5EF4-FFF2-40B4-BE49-F238E27FC236}">
+                <a16:creationId xmlns:a16="http://schemas.microsoft.com/office/drawing/2014/main" id="{DE3007F0-370E-9C78-A0A3-BC7E0C3F5508}"/>
+              </a:ext>
+            </a:extLst>
+          </p:cNvPr>
+          <p:cNvSpPr>
+            <a:spLocks noGrp="1"/>
+          </p:cNvSpPr>
+          <p:nvPr>
+            <p:ph type="title"/>
+          </p:nvPr>
+        </p:nvSpPr>
+        <p:spPr/>
+        <p:txBody>
+          <a:bodyPr/>
+          <a:lstStyle/>
+          <a:p>
+            <a:endParaRPr lang="en-US"/>
+          </a:p>
+        </p:txBody>
+      </p:sp>
+      <p:pic>
+        <p:nvPicPr>
+          <p:cNvPr id="5" name="Content Placeholder 4">
+            <a:extLst>
+              <a:ext uri="{FF2B5EF4-FFF2-40B4-BE49-F238E27FC236}">
+                <a16:creationId xmlns:a16="http://schemas.microsoft.com/office/drawing/2014/main" id="{4EF82837-12ED-996D-9D23-D2B2F86E8489}"/>
+              </a:ext>
+            </a:extLst>
+          </p:cNvPr>
+          <p:cNvPicPr>
+            <a:picLocks noGrp="1" noChangeAspect="1"/>
+          </p:cNvPicPr>
+          <p:nvPr>
+            <p:ph idx="1"/>
+          </p:nvPr>
+        </p:nvPicPr>
+        <p:blipFill>
+          <a:blip r:embed="rId2"/>
+          <a:stretch>
+            <a:fillRect/>
+          </a:stretch>
+        </p:blipFill>
+        <p:spPr>
+          <a:xfrm>
+            <a:off x="2175642" y="-7194"/>
+            <a:ext cx="6293094" cy="6865194"/>
+          </a:xfrm>
+        </p:spPr>
+      </p:pic>
+    </p:spTree>
+    <p:extLst>
+      <p:ext uri="{BB962C8B-B14F-4D97-AF65-F5344CB8AC3E}">
+        <p14:creationId xmlns:p14="http://schemas.microsoft.com/office/powerpoint/2010/main" val="2216708039"/>
+      </p:ext>
+    </p:extLst>
+  </p:cSld>
+  <p:clrMapOvr>
+    <a:masterClrMapping/>
+  </p:clrMapOvr>
+</p:sld>
+</file>
+
+<file path=ppt/slides/slide4.xml><?xml version="1.0" encoding="utf-8"?>
+<p:sld xmlns:a="http://schemas.openxmlformats.org/drawingml/2006/main" xmlns:r="http://schemas.openxmlformats.org/officeDocument/2006/relationships" xmlns:p="http://schemas.openxmlformats.org/presentationml/2006/main">
+  <p:cSld>
+    <p:spTree>
+      <p:nvGrpSpPr>
+        <p:cNvPr id="1" name=""/>
+        <p:cNvGrpSpPr/>
+        <p:nvPr/>
+      </p:nvGrpSpPr>
+      <p:grpSpPr>
+        <a:xfrm>
+          <a:off x="0" y="0"/>
+          <a:ext cx="0" cy="0"/>
+          <a:chOff x="0" y="0"/>
+          <a:chExt cx="0" cy="0"/>
+        </a:xfrm>
+      </p:grpSpPr>
+      <p:sp>
+        <p:nvSpPr>
+          <p:cNvPr id="2" name="Title 1"/>
+          <p:cNvSpPr>
+            <a:spLocks noGrp="1"/>
+          </p:cNvSpPr>
+          <p:nvPr>
+            <p:ph type="title"/>
+          </p:nvPr>
+        </p:nvSpPr>
+        <p:spPr/>
+        <p:txBody>
+          <a:bodyPr/>
+          <a:lstStyle/>
+          <a:p>
+            <a:r>
+              <a:rPr lang="en-US" dirty="0"/>
+              <a:t>Reference on writing results</a:t>
+            </a:r>
+          </a:p>
+        </p:txBody>
+      </p:sp>
+      <p:sp>
+        <p:nvSpPr>
+          <p:cNvPr id="3" name="Content Placeholder 2"/>
+          <p:cNvSpPr>
+            <a:spLocks noGrp="1"/>
+          </p:cNvSpPr>
+          <p:nvPr>
+            <p:ph idx="1"/>
+          </p:nvPr>
+        </p:nvSpPr>
+        <p:spPr/>
+        <p:txBody>
+          <a:bodyPr/>
+          <a:lstStyle/>
+          <a:p>
+            <a:r>
+              <a:rPr lang="en-US" dirty="0"/>
+              <a:t>There is a document on canvas with some tips for writing results statements</a:t>
+            </a:r>
+          </a:p>
+          <a:p>
+            <a:endParaRPr lang="en-US" dirty="0"/>
+          </a:p>
+        </p:txBody>
+      </p:sp>
+    </p:spTree>
+    <p:extLst>
+      <p:ext uri="{BB962C8B-B14F-4D97-AF65-F5344CB8AC3E}">
+        <p14:creationId xmlns:p14="http://schemas.microsoft.com/office/powerpoint/2010/main" val="781888978"/>
+      </p:ext>
+    </p:extLst>
+  </p:cSld>
+  <p:clrMapOvr>
+    <a:masterClrMapping/>
+  </p:clrMapOvr>
+</p:sld>
+</file>
+
+<file path=ppt/slides/slide5.xml><?xml version="1.0" encoding="utf-8"?>
+<p:sld xmlns:a="http://schemas.openxmlformats.org/drawingml/2006/main" xmlns:r="http://schemas.openxmlformats.org/officeDocument/2006/relationships" xmlns:p="http://schemas.openxmlformats.org/presentationml/2006/main">
+  <p:cSld>
+    <p:spTree>
+      <p:nvGrpSpPr>
+        <p:cNvPr id="1" name=""/>
+        <p:cNvGrpSpPr/>
+        <p:nvPr/>
+      </p:nvGrpSpPr>
+      <p:grpSpPr>
+        <a:xfrm>
+          <a:off x="0" y="0"/>
+          <a:ext cx="0" cy="0"/>
+          <a:chOff x="0" y="0"/>
+          <a:chExt cx="0" cy="0"/>
+        </a:xfrm>
+      </p:grpSpPr>
+      <p:sp>
+        <p:nvSpPr>
+          <p:cNvPr id="2" name="Title 1">
+            <a:extLst>
+              <a:ext uri="{FF2B5EF4-FFF2-40B4-BE49-F238E27FC236}">
                 <a16:creationId xmlns:a16="http://schemas.microsoft.com/office/drawing/2014/main" id="{F30583B3-8C25-0690-C3E6-FB44D2F10030}"/>
               </a:ext>
             </a:extLst>
@@ -3171,7 +3353,7 @@
           <a:p>
             <a:r>
               <a:rPr lang="en-US" dirty="0"/>
-              <a:t>If you need feedback urgently in order to progress with your presentation, please email me and Nichole so we can prioritize</a:t>
+              <a:t>If you need feedback urgently in order to progress with your project, please email me so we can prioritize</a:t>
             </a:r>
           </a:p>
         </p:txBody>
@@ -3189,7 +3371,7 @@
 </p:sld>
 </file>
 
-<file path=ppt/slides/slide4.xml><?xml version="1.0" encoding="utf-8"?>
+<file path=ppt/slides/slide6.xml><?xml version="1.0" encoding="utf-8"?>
 <p:sld xmlns:a="http://schemas.openxmlformats.org/drawingml/2006/main" xmlns:r="http://schemas.openxmlformats.org/officeDocument/2006/relationships" xmlns:p="http://schemas.openxmlformats.org/presentationml/2006/main">
   <p:cSld>
     <p:spTree>
